--- a/Our AI Journey Investing Below the Waterline.pptx
+++ b/Our AI Journey Investing Below the Waterline.pptx
@@ -1676,9 +1676,123 @@
           <a:chExt cx="0" cy="0"/>
         </a:xfrm>
       </p:grpSpPr>
+      <p:sp>
+        <p:nvSpPr>
+          <p:cNvPr id="2" name="Shape 0"/>
+          <p:cNvSpPr/>
+          <p:nvPr/>
+        </p:nvSpPr>
+        <p:spPr>
+          <a:xfrm>
+            <a:off x="0" y="0"/>
+            <a:ext cx="12192000" cy="2286000"/>
+          </a:xfrm>
+          <a:prstGeom prst="rect">
+            <a:avLst/>
+          </a:prstGeom>
+          <a:solidFill>
+            <a:srgbClr val="013F5E"/>
+          </a:solidFill>
+          <a:ln/>
+        </p:spPr>
+      </p:sp>
+      <p:sp>
+        <p:nvSpPr>
+          <p:cNvPr id="3" name="Shape 1"/>
+          <p:cNvSpPr/>
+          <p:nvPr/>
+        </p:nvSpPr>
+        <p:spPr>
+          <a:xfrm>
+            <a:off x="8255000" y="2298700"/>
+            <a:ext cx="2921000" cy="2984500"/>
+          </a:xfrm>
+          <a:custGeom>
+            <a:avLst/>
+            <a:gdLst/>
+            <a:ahLst/>
+            <a:cxnLst/>
+            <a:rect l="l" t="t" r="r" b="b"/>
+            <a:pathLst>
+              <a:path w="2921000" h="2984500">
+                <a:moveTo>
+                  <a:pt x="0" y="0"/>
+                </a:moveTo>
+                <a:lnTo>
+                  <a:pt x="2921000" y="0"/>
+                </a:lnTo>
+                <a:lnTo>
+                  <a:pt x="2921000" y="1524000"/>
+                </a:lnTo>
+                <a:arcTo hR="1460500" wR="1460500" stAng="0" swAng="5400000"/>
+                <a:lnTo>
+                  <a:pt x="1460500" y="2984500"/>
+                </a:lnTo>
+                <a:arcTo hR="1460500" wR="1460500" stAng="5400000" swAng="5400000"/>
+                <a:lnTo>
+                  <a:pt x="0" y="0"/>
+                </a:lnTo>
+                <a:close/>
+              </a:path>
+            </a:pathLst>
+          </a:custGeom>
+          <a:solidFill>
+            <a:srgbClr val="7FB8D6">
+              <a:alpha val="18000"/>
+            </a:srgbClr>
+          </a:solidFill>
+          <a:ln/>
+        </p:spPr>
+      </p:sp>
+      <p:sp>
+        <p:nvSpPr>
+          <p:cNvPr id="4" name="Shape 2"/>
+          <p:cNvSpPr/>
+          <p:nvPr/>
+        </p:nvSpPr>
+        <p:spPr>
+          <a:xfrm>
+            <a:off x="9017000" y="1270000"/>
+            <a:ext cx="1397000" cy="1016000"/>
+          </a:xfrm>
+          <a:custGeom>
+            <a:avLst/>
+            <a:gdLst/>
+            <a:ahLst/>
+            <a:cxnLst/>
+            <a:rect l="l" t="t" r="r" b="b"/>
+            <a:pathLst>
+              <a:path w="1397000" h="1016000">
+                <a:moveTo>
+                  <a:pt x="698500" y="0"/>
+                </a:moveTo>
+                <a:lnTo>
+                  <a:pt x="698500" y="0"/>
+                </a:lnTo>
+                <a:arcTo hR="698500" wR="698500" stAng="16200000" swAng="5400000"/>
+                <a:lnTo>
+                  <a:pt x="1397000" y="1016000"/>
+                </a:lnTo>
+                <a:lnTo>
+                  <a:pt x="0" y="1016000"/>
+                </a:lnTo>
+                <a:lnTo>
+                  <a:pt x="0" y="698500"/>
+                </a:lnTo>
+                <a:arcTo hR="698500" wR="698500" stAng="10800000" swAng="5400000"/>
+                <a:close/>
+              </a:path>
+            </a:pathLst>
+          </a:custGeom>
+          <a:solidFill>
+            <a:srgbClr val="FFFFFF"/>
+          </a:solidFill>
+          <a:ln/>
+        </p:spPr>
+      </p:sp>
       <p:pic>
         <p:nvPicPr>
-          <p:cNvPr id="2" name="Image 0" descr="Thin waterline across the slide">    </p:cNvPr>
+          <p:cNvPr id="5" name="Image 0" descr="line">    </p:cNvPr>
           <p:cNvPicPr>
             <a:picLocks noChangeAspect="1"/>
           </p:cNvPicPr>
@@ -1691,8 +1805,8 @@
         </p:blipFill>
         <p:spPr>
           <a:xfrm>
-            <a:off x="0" y="0"/>
-            <a:ext cx="12192000" cy="6858000"/>
+            <a:off x="0" y="2273300"/>
+            <a:ext cx="12192000" cy="38100"/>
           </a:xfrm>
           <a:prstGeom prst="rect">
             <a:avLst/>
@@ -1701,7 +1815,7 @@
       </p:pic>
       <p:sp>
         <p:nvSpPr>
-          <p:cNvPr id="3" name="Text 0"/>
+          <p:cNvPr id="6" name="Text 3"/>
           <p:cNvSpPr/>
           <p:nvPr/>
         </p:nvSpPr>
@@ -1745,7 +1859,7 @@
       </p:sp>
       <p:sp>
         <p:nvSpPr>
-          <p:cNvPr id="4" name="Text 1"/>
+          <p:cNvPr id="7" name="Text 4"/>
           <p:cNvSpPr/>
           <p:nvPr/>
         </p:nvSpPr>
@@ -1789,7 +1903,7 @@
       </p:sp>
       <p:sp>
         <p:nvSpPr>
-          <p:cNvPr id="5" name="Text 2"/>
+          <p:cNvPr id="8" name="Text 5"/>
           <p:cNvSpPr/>
           <p:nvPr/>
         </p:nvSpPr>
@@ -1833,7 +1947,7 @@
       </p:sp>
       <p:sp>
         <p:nvSpPr>
-          <p:cNvPr id="6" name="Text 3"/>
+          <p:cNvPr id="9" name="Text 6"/>
           <p:cNvSpPr/>
           <p:nvPr/>
         </p:nvSpPr>
@@ -4048,7 +4162,7 @@
     <p:bg>
       <p:bgPr>
         <a:solidFill>
-          <a:srgbClr val="014E74"/>
+          <a:srgbClr val="EAF2F7"/>
         </a:solidFill>
       </p:bgPr>
     </p:bg>
@@ -4066,9 +4180,29 @@
           <a:chExt cx="0" cy="0"/>
         </a:xfrm>
       </p:grpSpPr>
+      <p:sp>
+        <p:nvSpPr>
+          <p:cNvPr id="2" name="Shape 0"/>
+          <p:cNvSpPr/>
+          <p:nvPr/>
+        </p:nvSpPr>
+        <p:spPr>
+          <a:xfrm>
+            <a:off x="0" y="2667000"/>
+            <a:ext cx="12192000" cy="4191000"/>
+          </a:xfrm>
+          <a:prstGeom prst="rect">
+            <a:avLst/>
+          </a:prstGeom>
+          <a:solidFill>
+            <a:srgbClr val="014E74"/>
+          </a:solidFill>
+          <a:ln/>
+        </p:spPr>
+      </p:sp>
       <p:pic>
         <p:nvPicPr>
-          <p:cNvPr id="2" name="Image 0" descr="An iceberg: a small tip of AI applications above the waterline and a much larger mass of tools, calculations and data below it">    </p:cNvPr>
+          <p:cNvPr id="3" name="Image 0" descr="Iceberg shape: small tip above the waterline, large layered mass below">    </p:cNvPr>
           <p:cNvPicPr>
             <a:picLocks noChangeAspect="1"/>
           </p:cNvPicPr>
@@ -4081,17 +4215,352 @@
         </p:blipFill>
         <p:spPr>
           <a:xfrm>
-            <a:off x="0" y="0"/>
-            <a:ext cx="12192000" cy="6858000"/>
+            <a:off x="1270000" y="984250"/>
+            <a:ext cx="4921250" cy="5619750"/>
           </a:xfrm>
           <a:prstGeom prst="rect">
             <a:avLst/>
           </a:prstGeom>
         </p:spPr>
       </p:pic>
-      <p:sp>
-        <p:nvSpPr>
-          <p:cNvPr id="3" name="Text 0"/>
+      <p:pic>
+        <p:nvPicPr>
+          <p:cNvPr id="4" name="Image 1" descr="line">    </p:cNvPr>
+          <p:cNvPicPr>
+            <a:picLocks noChangeAspect="1"/>
+          </p:cNvPicPr>
+          <p:nvPr/>
+        </p:nvPicPr>
+        <p:blipFill>
+          <a:blip r:embed="rId2"/>
+          <a:srcRect l="0" r="0" t="0" b="0"/>
+          <a:stretch/>
+        </p:blipFill>
+        <p:spPr>
+          <a:xfrm>
+            <a:off x="0" y="2654300"/>
+            <a:ext cx="12192000" cy="50800"/>
+          </a:xfrm>
+          <a:prstGeom prst="rect">
+            <a:avLst/>
+          </a:prstGeom>
+        </p:spPr>
+      </p:pic>
+      <p:sp>
+        <p:nvSpPr>
+          <p:cNvPr id="5" name="Text 1"/>
+          <p:cNvSpPr/>
+          <p:nvPr/>
+        </p:nvSpPr>
+        <p:spPr>
+          <a:xfrm>
+            <a:off x="2959100" y="2324100"/>
+            <a:ext cx="1574800" cy="238720"/>
+          </a:xfrm>
+          <a:prstGeom prst="rect">
+            <a:avLst/>
+          </a:prstGeom>
+          <a:noFill/>
+          <a:ln/>
+        </p:spPr>
+        <p:txBody>
+          <a:bodyPr wrap="square" lIns="0" tIns="0" rIns="0" bIns="0" rtlCol="0" anchor="t">
+            <a:normAutofit/>
+          </a:bodyPr>
+          <a:lstStyle/>
+          <a:p>
+            <a:pPr algn="ctr" indent="0" marL="0">
+              <a:lnSpc>
+                <a:spcPts val="1680"/>
+              </a:lnSpc>
+              <a:buNone/>
+            </a:pPr>
+            <a:r>
+              <a:rPr lang="en-US" sz="1200" b="1" dirty="0">
+                <a:solidFill>
+                  <a:srgbClr val="141414"/>
+                </a:solidFill>
+                <a:latin typeface="Arial" pitchFamily="34" charset="0"/>
+                <a:ea typeface="Arial" pitchFamily="34" charset="-122"/>
+                <a:cs typeface="Arial" pitchFamily="34" charset="-120"/>
+              </a:rPr>
+              <a:t>AGENTS</a:t>
+            </a:r>
+            <a:endParaRPr lang="en-US" sz="1200" dirty="0"/>
+          </a:p>
+        </p:txBody>
+      </p:sp>
+      <p:sp>
+        <p:nvSpPr>
+          <p:cNvPr id="6" name="Text 2"/>
+          <p:cNvSpPr/>
+          <p:nvPr/>
+        </p:nvSpPr>
+        <p:spPr>
+          <a:xfrm>
+            <a:off x="2765425" y="3111500"/>
+            <a:ext cx="1962150" cy="292100"/>
+          </a:xfrm>
+          <a:prstGeom prst="rect">
+            <a:avLst/>
+          </a:prstGeom>
+          <a:noFill/>
+          <a:ln/>
+        </p:spPr>
+        <p:txBody>
+          <a:bodyPr wrap="square" lIns="0" tIns="0" rIns="0" bIns="0" rtlCol="0" anchor="t">
+            <a:normAutofit/>
+          </a:bodyPr>
+          <a:lstStyle/>
+          <a:p>
+            <a:pPr algn="ctr" indent="0" marL="0">
+              <a:lnSpc>
+                <a:spcPts val="2100"/>
+              </a:lnSpc>
+              <a:buNone/>
+            </a:pPr>
+            <a:r>
+              <a:rPr lang="en-US" sz="1500" b="1" dirty="0">
+                <a:solidFill>
+                  <a:srgbClr val="141414"/>
+                </a:solidFill>
+                <a:latin typeface="Arial" pitchFamily="34" charset="0"/>
+                <a:ea typeface="Arial" pitchFamily="34" charset="-122"/>
+                <a:cs typeface="Arial" pitchFamily="34" charset="-120"/>
+              </a:rPr>
+              <a:t>TOOLS</a:t>
+            </a:r>
+            <a:endParaRPr lang="en-US" sz="1500" dirty="0"/>
+          </a:p>
+        </p:txBody>
+      </p:sp>
+      <p:sp>
+        <p:nvSpPr>
+          <p:cNvPr id="7" name="Text 3"/>
+          <p:cNvSpPr/>
+          <p:nvPr/>
+        </p:nvSpPr>
+        <p:spPr>
+          <a:xfrm>
+            <a:off x="2438400" y="4330700"/>
+            <a:ext cx="2616200" cy="292100"/>
+          </a:xfrm>
+          <a:prstGeom prst="rect">
+            <a:avLst/>
+          </a:prstGeom>
+          <a:noFill/>
+          <a:ln/>
+        </p:spPr>
+        <p:txBody>
+          <a:bodyPr wrap="square" lIns="0" tIns="0" rIns="0" bIns="0" rtlCol="0" anchor="t">
+            <a:normAutofit/>
+          </a:bodyPr>
+          <a:lstStyle/>
+          <a:p>
+            <a:pPr algn="ctr" indent="0" marL="0">
+              <a:lnSpc>
+                <a:spcPts val="2100"/>
+              </a:lnSpc>
+              <a:buNone/>
+            </a:pPr>
+            <a:r>
+              <a:rPr lang="en-US" sz="1500" b="1" dirty="0">
+                <a:solidFill>
+                  <a:srgbClr val="FFFFFF"/>
+                </a:solidFill>
+                <a:latin typeface="Arial" pitchFamily="34" charset="0"/>
+                <a:ea typeface="Arial" pitchFamily="34" charset="-122"/>
+                <a:cs typeface="Arial" pitchFamily="34" charset="-120"/>
+              </a:rPr>
+              <a:t>CALCULATIONS</a:t>
+            </a:r>
+            <a:endParaRPr lang="en-US" sz="1500" dirty="0"/>
+          </a:p>
+        </p:txBody>
+      </p:sp>
+      <p:sp>
+        <p:nvSpPr>
+          <p:cNvPr id="8" name="Text 4"/>
+          <p:cNvSpPr/>
+          <p:nvPr/>
+        </p:nvSpPr>
+        <p:spPr>
+          <a:xfrm>
+            <a:off x="2765425" y="5600700"/>
+            <a:ext cx="1962150" cy="292100"/>
+          </a:xfrm>
+          <a:prstGeom prst="rect">
+            <a:avLst/>
+          </a:prstGeom>
+          <a:noFill/>
+          <a:ln/>
+        </p:spPr>
+        <p:txBody>
+          <a:bodyPr wrap="square" lIns="0" tIns="0" rIns="0" bIns="0" rtlCol="0" anchor="t">
+            <a:normAutofit/>
+          </a:bodyPr>
+          <a:lstStyle/>
+          <a:p>
+            <a:pPr algn="ctr" indent="0" marL="0">
+              <a:lnSpc>
+                <a:spcPts val="2100"/>
+              </a:lnSpc>
+              <a:buNone/>
+            </a:pPr>
+            <a:r>
+              <a:rPr lang="en-US" sz="1500" b="1" dirty="0">
+                <a:solidFill>
+                  <a:srgbClr val="FFFFFF"/>
+                </a:solidFill>
+                <a:latin typeface="Arial" pitchFamily="34" charset="0"/>
+                <a:ea typeface="Arial" pitchFamily="34" charset="-122"/>
+                <a:cs typeface="Arial" pitchFamily="34" charset="-120"/>
+              </a:rPr>
+              <a:t>DATA</a:t>
+            </a:r>
+            <a:endParaRPr lang="en-US" sz="1500" dirty="0"/>
+          </a:p>
+        </p:txBody>
+      </p:sp>
+      <p:pic>
+        <p:nvPicPr>
+          <p:cNvPr id="9" name="Image 2" descr="connector">    </p:cNvPr>
+          <p:cNvPicPr>
+            <a:picLocks noChangeAspect="1"/>
+          </p:cNvPicPr>
+          <p:nvPr/>
+        </p:nvPicPr>
+        <p:blipFill>
+          <a:blip r:embed="rId3"/>
+          <a:srcRect l="0" r="0" t="0" b="0"/>
+          <a:stretch/>
+        </p:blipFill>
+        <p:spPr>
+          <a:xfrm>
+            <a:off x="889000" y="3492500"/>
+            <a:ext cx="127000" cy="2540000"/>
+          </a:xfrm>
+          <a:prstGeom prst="rect">
+            <a:avLst/>
+          </a:prstGeom>
+        </p:spPr>
+      </p:pic>
+      <p:sp>
+        <p:nvSpPr>
+          <p:cNvPr id="10" name="Text 5"/>
+          <p:cNvSpPr/>
+          <p:nvPr/>
+        </p:nvSpPr>
+        <p:spPr>
+          <a:xfrm>
+            <a:off x="812800" y="2794000"/>
+            <a:ext cx="1257300" cy="619671"/>
+          </a:xfrm>
+          <a:prstGeom prst="rect">
+            <a:avLst/>
+          </a:prstGeom>
+          <a:noFill/>
+          <a:ln/>
+        </p:spPr>
+        <p:txBody>
+          <a:bodyPr wrap="square" lIns="0" tIns="0" rIns="0" bIns="0" rtlCol="0" anchor="t">
+            <a:normAutofit/>
+          </a:bodyPr>
+          <a:lstStyle/>
+          <a:p>
+            <a:pPr algn="l" indent="0" marL="0">
+              <a:lnSpc>
+                <a:spcPts val="1560"/>
+              </a:lnSpc>
+              <a:buNone/>
+            </a:pPr>
+            <a:r>
+              <a:rPr lang="en-US" sz="1200" b="1" dirty="0">
+                <a:solidFill>
+                  <a:srgbClr val="FFFFFF"/>
+                </a:solidFill>
+                <a:latin typeface="Arial" pitchFamily="34" charset="0"/>
+                <a:ea typeface="Arial" pitchFamily="34" charset="-122"/>
+                <a:cs typeface="Arial" pitchFamily="34" charset="-120"/>
+              </a:rPr>
+              <a:t>BUILD FROM THE BOTTOM UP</a:t>
+            </a:r>
+            <a:endParaRPr lang="en-US" sz="1200" dirty="0"/>
+          </a:p>
+        </p:txBody>
+      </p:sp>
+      <p:pic>
+        <p:nvPicPr>
+          <p:cNvPr id="11" name="Image 3" descr="connector">    </p:cNvPr>
+          <p:cNvPicPr>
+            <a:picLocks noChangeAspect="1"/>
+          </p:cNvPicPr>
+          <p:nvPr/>
+        </p:nvPicPr>
+        <p:blipFill>
+          <a:blip r:embed="rId4"/>
+          <a:srcRect l="0" r="0" t="0" b="0"/>
+          <a:stretch/>
+        </p:blipFill>
+        <p:spPr>
+          <a:xfrm>
+            <a:off x="5613400" y="3213100"/>
+            <a:ext cx="927100" cy="76200"/>
+          </a:xfrm>
+          <a:prstGeom prst="rect">
+            <a:avLst/>
+          </a:prstGeom>
+        </p:spPr>
+      </p:pic>
+      <p:pic>
+        <p:nvPicPr>
+          <p:cNvPr id="12" name="Image 4" descr="connector">    </p:cNvPr>
+          <p:cNvPicPr>
+            <a:picLocks noChangeAspect="1"/>
+          </p:cNvPicPr>
+          <p:nvPr/>
+        </p:nvPicPr>
+        <p:blipFill>
+          <a:blip r:embed="rId5"/>
+          <a:srcRect l="0" r="0" t="0" b="0"/>
+          <a:stretch/>
+        </p:blipFill>
+        <p:spPr>
+          <a:xfrm>
+            <a:off x="6153150" y="4419600"/>
+            <a:ext cx="387350" cy="76200"/>
+          </a:xfrm>
+          <a:prstGeom prst="rect">
+            <a:avLst/>
+          </a:prstGeom>
+        </p:spPr>
+      </p:pic>
+      <p:pic>
+        <p:nvPicPr>
+          <p:cNvPr id="13" name="Image 5" descr="connector">    </p:cNvPr>
+          <p:cNvPicPr>
+            <a:picLocks noChangeAspect="1"/>
+          </p:cNvPicPr>
+          <p:nvPr/>
+        </p:nvPicPr>
+        <p:blipFill>
+          <a:blip r:embed="rId6"/>
+          <a:srcRect l="0" r="0" t="0" b="0"/>
+          <a:stretch/>
+        </p:blipFill>
+        <p:spPr>
+          <a:xfrm>
+            <a:off x="5772150" y="5562600"/>
+            <a:ext cx="768350" cy="76200"/>
+          </a:xfrm>
+          <a:prstGeom prst="rect">
+            <a:avLst/>
+          </a:prstGeom>
+        </p:spPr>
+      </p:pic>
+      <p:sp>
+        <p:nvSpPr>
+          <p:cNvPr id="14" name="Text 6"/>
           <p:cNvSpPr/>
           <p:nvPr/>
         </p:nvSpPr>
@@ -4135,7 +4604,7 @@
       </p:sp>
       <p:sp>
         <p:nvSpPr>
-          <p:cNvPr id="4" name="Text 1"/>
+          <p:cNvPr id="15" name="Text 7"/>
           <p:cNvSpPr/>
           <p:nvPr/>
         </p:nvSpPr>
@@ -4179,7 +4648,7 @@
       </p:sp>
       <p:sp>
         <p:nvSpPr>
-          <p:cNvPr id="5" name="Text 2"/>
+          <p:cNvPr id="16" name="Text 8"/>
           <p:cNvSpPr/>
           <p:nvPr/>
         </p:nvSpPr>
@@ -4223,7 +4692,7 @@
       </p:sp>
       <p:sp>
         <p:nvSpPr>
-          <p:cNvPr id="6" name="Text 3"/>
+          <p:cNvPr id="17" name="Text 9"/>
           <p:cNvSpPr/>
           <p:nvPr/>
         </p:nvSpPr>
@@ -4267,7 +4736,7 @@
       </p:sp>
       <p:sp>
         <p:nvSpPr>
-          <p:cNvPr id="7" name="Text 4"/>
+          <p:cNvPr id="18" name="Text 10"/>
           <p:cNvSpPr/>
           <p:nvPr/>
         </p:nvSpPr>
@@ -4311,7 +4780,7 @@
       </p:sp>
       <p:sp>
         <p:nvSpPr>
-          <p:cNvPr id="8" name="Text 5"/>
+          <p:cNvPr id="19" name="Text 11"/>
           <p:cNvSpPr/>
           <p:nvPr/>
         </p:nvSpPr>
@@ -4355,7 +4824,7 @@
       </p:sp>
       <p:sp>
         <p:nvSpPr>
-          <p:cNvPr id="9" name="Text 6"/>
+          <p:cNvPr id="20" name="Text 12"/>
           <p:cNvSpPr/>
           <p:nvPr/>
         </p:nvSpPr>
@@ -4399,7 +4868,7 @@
       </p:sp>
       <p:sp>
         <p:nvSpPr>
-          <p:cNvPr id="10" name="Text 7"/>
+          <p:cNvPr id="21" name="Text 13"/>
           <p:cNvSpPr/>
           <p:nvPr/>
         </p:nvSpPr>
@@ -4443,7 +4912,7 @@
       </p:sp>
       <p:sp>
         <p:nvSpPr>
-          <p:cNvPr id="11" name="Text 8"/>
+          <p:cNvPr id="22" name="Text 14"/>
           <p:cNvSpPr/>
           <p:nvPr/>
         </p:nvSpPr>
@@ -4487,7 +4956,7 @@
       </p:sp>
       <p:sp>
         <p:nvSpPr>
-          <p:cNvPr id="12" name="Text 9"/>
+          <p:cNvPr id="23" name="Text 15"/>
           <p:cNvSpPr/>
           <p:nvPr/>
         </p:nvSpPr>
